--- a/learning/P01_zephyr_make_project/slides/P010_Zephyr的CMake输入与依赖发现_Windows.pptx
+++ b/learning/P01_zephyr_make_project/slides/P010_Zephyr的CMake输入与依赖发现_Windows.pptx
@@ -4510,226 +4510,267 @@
           <a:lstStyle/>
           <a:p>
             <a:r>
+              <a:rPr/>
               <a:t>配套正文：P010_Zephyr的CMake输入与依赖发现_Windows.md#section-10-3-3</a:t>
             </a:r>
           </a:p>
           <a:p>
             <a:r>
+              <a:rPr/>
               <a:t>10.3.3 · ③ 源码模块接入</a:t>
             </a:r>
           </a:p>
           <a:p>
             <a:r>
+              <a:rPr/>
               <a:t>Python 识别元数据后生成 zephyr_modules.txt。</a:t>
             </a:r>
           </a:p>
           <a:p>
             <a:r>
+              <a:rPr/>
               <a:t>zephyr_module.cmake 读取记录，规范化名字并设置目录变量。</a:t>
             </a:r>
           </a:p>
           <a:p>
             <a:r>
-              <a:t>根 CMakeLists 再加载每个已识别模块的 CMake 入口。</a:t>
-            </a:r>
-          </a:p>
-          <a:p>
-            <a:r>
+              <a:rPr>
+                <a:solidFill>
+                  <a:srgbClr val="29263B"/>
+                </a:solidFill>
+              </a:rPr>
+              <a:t xml:space="preserve">根 </a:t>
+            </a:r>
+            <a:r>
+              <a:rPr>
+                <a:solidFill>
+                  <a:srgbClr val="0070C0"/>
+                </a:solidFill>
+              </a:rPr>
+              <a:t>CMakeLists.txt</a:t>
+            </a:r>
+            <a:r>
+              <a:rPr>
+                <a:solidFill>
+                  <a:srgbClr val="29263B"/>
+                </a:solidFill>
+              </a:rPr>
+              <a:t xml:space="preserve"> 再加载提供了非空 CMake 入口的模块。</a:t>
+            </a:r>
+          </a:p>
+          <a:p>
+            <a:r>
+              <a:rPr/>
               <a:t>MODULE_DIR 是结果；提前伪造它不会代替这些步骤。</a:t>
             </a:r>
           </a:p>
+          <a:p/>
+          <a:p>
+            <a:r>
+              <a:rPr/>
+              <a:t>讲解展开：</a:t>
+            </a:r>
+          </a:p>
+          <a:p>
+            <a:r>
+              <a:rPr/>
+              <a:t>### 10.3.3\_派生变量究竟是谁建立的</a:t>
+            </a:r>
+          </a:p>
+          <a:p/>
+          <a:p>
+            <a:r>
+              <a:rPr/>
+              <a:t>```mermaid</a:t>
+            </a:r>
+          </a:p>
+          <a:p>
+            <a:r>
+              <a:rPr/>
+              <a:t>flowchart TD</a:t>
+            </a:r>
+          </a:p>
+          <a:p>
+            <a:r>
+              <a:rPr/>
+              <a:t xml:space="preserve">    A["CMake：west 候选与显式追加路径"] --&gt; B["zephyr_module.py：读取模块元数据"]</a:t>
+            </a:r>
+          </a:p>
+          <a:p>
+            <a:r>
+              <a:rPr/>
+              <a:t xml:space="preserve">    B --&gt; C["生成 zephyr_modules.txt 与 Kconfig 接入记录"]</a:t>
+            </a:r>
+          </a:p>
+          <a:p>
+            <a:r>
+              <a:rPr/>
+              <a:t xml:space="preserve">    C --&gt; D["zephyr_module.cmake：设置模块目录变量"]</a:t>
+            </a:r>
+          </a:p>
+          <a:p>
+            <a:r>
+              <a:rPr/>
+              <a:t xml:space="preserve">    D --&gt; E["根 CMakeLists：add_subdirectory 加载入口"]</a:t>
+            </a:r>
+          </a:p>
+          <a:p>
+            <a:r>
+              <a:rPr/>
+              <a:t xml:space="preserve">    E --&gt; F["模块脚本：加入头文件、源码和库"]</a:t>
+            </a:r>
+          </a:p>
+          <a:p>
+            <a:r>
+              <a:rPr/>
+              <a:t>```</a:t>
+            </a:r>
+          </a:p>
+          <a:p/>
+          <a:p>
+            <a:r>
+              <a:rPr/>
+              <a:t>`zephyr_modules.txt` 是**工具生成文件**，位于所选构建目录。它不是读者必须提前创建的清单，也不是 west.yml。`zephyr_module.cmake` 读取其中名字、模块根和 CMake 入口，把名字规范化为大写后设置变量；例如模块名 `hal_xhsc` 对应 `ZEPHYR_HAL_XHSC_MODULE_DIR`。</a:t>
+            </a:r>
+          </a:p>
+          <a:p/>
+          <a:p>
+            <a:r>
+              <a:rPr/>
+              <a:t>接着 Zephyr 根 CMakeLists 遍历已识别模块，设置本轮 `ZEPHYR_CURRENT_MODULE_DIR` 等上下文，再调用 `add_subdirectory` 执行该模块的 CMake 入口。只有走过候选识别、元数据解析和记录读取，才有这个派生变量。**预先手填同名 MODULE_DIR 不会代替模块注册与入口执行。**</a:t>
+            </a:r>
+          </a:p>
+          <a:p/>
+          <a:p>
+            <a:r>
+              <a:rPr/>
+              <a:t>再换成时序图看“谁先调用谁”。图中的 Zephyr CMake 和模块入口实际都由同一个 CMake 进程执行，分列只是区分脚本的职责；Python 发现脚本由 CMake 启动。</a:t>
+            </a:r>
+          </a:p>
+          <a:p/>
+          <a:p>
+            <a:r>
+              <a:rPr/>
+              <a:t>```mermaid</a:t>
+            </a:r>
+          </a:p>
+          <a:p>
+            <a:r>
+              <a:rPr/>
+              <a:t>sequenceDiagram</a:t>
+            </a:r>
+          </a:p>
+          <a:p>
+            <a:r>
+              <a:rPr/>
+              <a:t xml:space="preserve">    participant A as 应用配置调用者</a:t>
+            </a:r>
+          </a:p>
+          <a:p>
+            <a:r>
+              <a:rPr/>
+              <a:t xml:space="preserve">    participant C as Zephyr CMake 脚本</a:t>
+            </a:r>
+          </a:p>
+          <a:p>
+            <a:r>
+              <a:rPr/>
+              <a:t xml:space="preserve">    participant P as Python 模块发现脚本</a:t>
+            </a:r>
+          </a:p>
+          <a:p>
+            <a:r>
+              <a:rPr/>
+              <a:t xml:space="preserve">    participant M as 模块 CMake 入口</a:t>
+            </a:r>
+          </a:p>
+          <a:p>
+            <a:r>
+              <a:rPr/>
+              <a:t xml:space="preserve">    A-&gt;&gt;C: 发起配置，提供追加模块根</a:t>
+            </a:r>
+          </a:p>
+          <a:p>
+            <a:r>
+              <a:rPr/>
+              <a:t xml:space="preserve">    C-&gt;&gt;P: 传入候选列表与追加路径</a:t>
+            </a:r>
+          </a:p>
+          <a:p>
+            <a:r>
+              <a:rPr/>
+              <a:t xml:space="preserve">    Note over P: 读取 module.yml 并写出模块记录</a:t>
+            </a:r>
+          </a:p>
+          <a:p>
+            <a:r>
+              <a:rPr/>
+              <a:t xml:space="preserve">    P--&gt;&gt;C: 完成识别，返回状态</a:t>
+            </a:r>
+          </a:p>
+          <a:p>
+            <a:r>
+              <a:rPr/>
+              <a:t xml:space="preserve">    C-&gt;&gt;C: 读取记录并设置模块目录变量</a:t>
+            </a:r>
+          </a:p>
+          <a:p>
+            <a:r>
+              <a:rPr/>
+              <a:t xml:space="preserve">    C-&gt;&gt;M: add_subdirectory 加载接入入口</a:t>
+            </a:r>
+          </a:p>
+          <a:p>
+            <a:r>
+              <a:rPr/>
+              <a:t xml:space="preserve">    M-&gt;&gt;C: 添加库、源码与头文件目录</a:t>
+            </a:r>
+          </a:p>
+          <a:p>
+            <a:r>
+              <a:rPr/>
+              <a:t>```</a:t>
+            </a:r>
+          </a:p>
+          <a:p/>
+          <a:p>
+            <a:r>
+              <a:rPr/>
+              <a:t>发现成功也不保证模块里所有源文件都编译。模块 CMake 还会受 CONFIG 条件限制；芯片、板和驱动是否已经适配是更后面的事实。P006 解释并验证模块发现，P012 展开目标板的实际构建。依据：[模块输入与发现脚本调用](https://github.com/zephyrproject-rtos/zephyr/blob/25c8f4a23988dd3b2cfb463613622738298c2d6c/cmake/modules/zephyr_module.cmake#L34)（原件 `cmake/modules/zephyr_module.cmake`，第 34 行附近）；[派生模块目录变量创建处](https://github.com/zephyrproject-rtos/zephyr/blob/25c8f4a23988dd3b2cfb463613622738298c2d6c/cmake/modules/zephyr_module.cmake#L141)（原件 `cmake/modules/zephyr_module.cmake`，第 141 行附近）；[外部模块 CMake 入口加载处](https://github.com/zephyrproject-rtos/zephyr/blob/25c8f4a23988dd3b2cfb463613622738298c2d6c/CMakeLists.txt#L778)（原件 `CMakeLists.txt`，第 778 行附近）。</a:t>
+            </a:r>
+          </a:p>
+          <a:p/>
+          <a:p>
+            <a:r>
+              <a:rPr/>
+              <a:t>&lt;a id="section-10-3-4"&gt;&lt;/a&gt;</a:t>
+            </a:r>
+          </a:p>
           <a:p>
             <a:endParaRPr/>
           </a:p>
-          <a:p>
-            <a:r>
-              <a:t>讲解展开：</a:t>
-            </a:r>
-          </a:p>
-          <a:p>
-            <a:r>
-              <a:t>### 10.3.3\_派生变量究竟是谁建立的</a:t>
-            </a:r>
-          </a:p>
-          <a:p>
-            <a:endParaRPr/>
-          </a:p>
-          <a:p>
-            <a:r>
-              <a:t>```mermaid</a:t>
-            </a:r>
-          </a:p>
-          <a:p>
-            <a:r>
-              <a:t>flowchart TD</a:t>
-            </a:r>
-          </a:p>
-          <a:p>
-            <a:r>
-              <a:t>    A["CMake：west 候选与显式追加路径"] --&gt; B["zephyr_module.py：读取模块元数据"]</a:t>
-            </a:r>
-          </a:p>
-          <a:p>
-            <a:r>
-              <a:t>    B --&gt; C["生成 zephyr_modules.txt 与 Kconfig 接入记录"]</a:t>
-            </a:r>
-          </a:p>
-          <a:p>
-            <a:r>
-              <a:t>    C --&gt; D["zephyr_module.cmake：设置模块目录变量"]</a:t>
-            </a:r>
-          </a:p>
-          <a:p>
-            <a:r>
-              <a:t>    D --&gt; E["根 CMakeLists：add_subdirectory 加载入口"]</a:t>
-            </a:r>
-          </a:p>
-          <a:p>
-            <a:r>
-              <a:t>    E --&gt; F["模块脚本：加入头文件、源码和库"]</a:t>
-            </a:r>
-          </a:p>
-          <a:p>
-            <a:r>
-              <a:t>```</a:t>
-            </a:r>
-          </a:p>
-          <a:p>
-            <a:endParaRPr/>
-          </a:p>
-          <a:p>
-            <a:r>
-              <a:t>`zephyr_modules.txt` 是**工具生成文件**，位于所选构建目录。它不是读者必须提前创建的清单，也不是 west.yml。`zephyr_module.cmake` 读取其中名字、模块根和 CMake 入口，把名字规范化为大写后设置变量；例如模块名 `hal_xhsc` 对应 `ZEPHYR_HAL_XHSC_MODULE_DIR`。</a:t>
-            </a:r>
-          </a:p>
-          <a:p>
-            <a:endParaRPr/>
-          </a:p>
-          <a:p>
-            <a:r>
-              <a:t>接着 Zephyr 根 CMakeLists 遍历已识别模块，设置本轮 `ZEPHYR_CURRENT_MODULE_DIR` 等上下文，再调用 `add_subdirectory` 执行该模块的 CMake 入口。只有走过候选识别、元数据解析和记录读取，才有这个派生变量。**预先手填同名 MODULE_DIR 不会代替模块注册与入口执行。**</a:t>
-            </a:r>
-          </a:p>
-          <a:p>
-            <a:endParaRPr/>
-          </a:p>
-          <a:p>
-            <a:r>
-              <a:t>再换成时序图看“谁先调用谁”。图中的 Zephyr CMake 和模块入口实际都由同一个 CMake 进程执行，分列只是区分脚本的职责；Python 发现脚本由 CMake 启动。</a:t>
-            </a:r>
-          </a:p>
-          <a:p>
-            <a:endParaRPr/>
-          </a:p>
-          <a:p>
-            <a:r>
-              <a:t>```mermaid</a:t>
-            </a:r>
-          </a:p>
-          <a:p>
-            <a:r>
-              <a:t>sequenceDiagram</a:t>
-            </a:r>
-          </a:p>
-          <a:p>
-            <a:r>
-              <a:t>    participant A as 应用配置调用者</a:t>
-            </a:r>
-          </a:p>
-          <a:p>
-            <a:r>
-              <a:t>    participant C as Zephyr CMake 脚本</a:t>
-            </a:r>
-          </a:p>
-          <a:p>
-            <a:r>
-              <a:t>    participant P as Python 模块发现脚本</a:t>
-            </a:r>
-          </a:p>
-          <a:p>
-            <a:r>
-              <a:t>    participant M as 模块 CMake 入口</a:t>
-            </a:r>
-          </a:p>
-          <a:p>
-            <a:r>
-              <a:t>    A-&gt;&gt;C: 发起配置，提供追加模块根</a:t>
-            </a:r>
-          </a:p>
-          <a:p>
-            <a:r>
-              <a:t>    C-&gt;&gt;P: 传入候选列表与追加路径</a:t>
-            </a:r>
-          </a:p>
-          <a:p>
-            <a:r>
-              <a:t>    Note over P: 读取 module.yml 并写出模块记录</a:t>
-            </a:r>
-          </a:p>
-          <a:p>
-            <a:r>
-              <a:t>    P--&gt;&gt;C: 完成识别，返回状态</a:t>
-            </a:r>
-          </a:p>
-          <a:p>
-            <a:r>
-              <a:t>    C-&gt;&gt;C: 读取记录并设置模块目录变量</a:t>
-            </a:r>
-          </a:p>
-          <a:p>
-            <a:r>
-              <a:t>    C-&gt;&gt;M: add_subdirectory 加载接入入口</a:t>
-            </a:r>
-          </a:p>
-          <a:p>
-            <a:r>
-              <a:t>    M-&gt;&gt;C: 添加库、源码与头文件目录</a:t>
-            </a:r>
-          </a:p>
-          <a:p>
-            <a:r>
-              <a:t>```</a:t>
-            </a:r>
-          </a:p>
-          <a:p>
-            <a:endParaRPr/>
-          </a:p>
-          <a:p>
-            <a:r>
-              <a:t>发现成功也不保证模块里所有源文件都编译。模块 CMake 还会受 CONFIG 条件限制；芯片、板和驱动是否已经适配是更后面的事实。P006 解释并验证模块发现，P012 展开目标板的实际构建。依据：[模块输入与发现脚本调用](https://github.com/zephyrproject-rtos/zephyr/blob/25c8f4a23988dd3b2cfb463613622738298c2d6c/cmake/modules/zephyr_module.cmake#L34)（原件 `cmake/modules/zephyr_module.cmake`，第 34 行附近）；[派生模块目录变量创建处](https://github.com/zephyrproject-rtos/zephyr/blob/25c8f4a23988dd3b2cfb463613622738298c2d6c/cmake/modules/zephyr_module.cmake#L141)（原件 `cmake/modules/zephyr_module.cmake`，第 141 行附近）；[外部模块 CMake 入口加载处](https://github.com/zephyrproject-rtos/zephyr/blob/25c8f4a23988dd3b2cfb463613622738298c2d6c/CMakeLists.txt#L778)（原件 `CMakeLists.txt`，第 778 行附近）。</a:t>
-            </a:r>
-          </a:p>
-          <a:p>
-            <a:endParaRPr/>
-          </a:p>
-          <a:p>
-            <a:r>
-              <a:t>&lt;a id="section-10-3-4"&gt;&lt;/a&gt;</a:t>
-            </a:r>
-          </a:p>
-          <a:p>
-            <a:endParaRPr/>
-          </a:p>
-          <a:p>
-            <a:endParaRPr/>
-          </a:p>
-          <a:p>
-            <a:r>
+          <a:p/>
+          <a:p>
+            <a:r>
+              <a:rPr/>
               <a:t>官方说明：https://docs.zephyrproject.org/latest/develop/modules.html</a:t>
             </a:r>
           </a:p>
           <a:p>
             <a:r>
+              <a:rPr/>
               <a:t>仓库原件：https://github.com/zephyrproject-rtos/zephyr/blob/25c8f4a23988dd3b2cfb463613622738298c2d6c/doc/develop/modules.rst#L3</a:t>
             </a:r>
           </a:p>
           <a:p>
             <a:r>
+              <a:rPr/>
               <a:t>实现定位：https://github.com/zephyrproject-rtos/zephyr/blob/25c8f4a23988dd3b2cfb463613622738298c2d6c/cmake/modules/zephyr_module.cmake#L141</a:t>
             </a:r>
           </a:p>
           <a:p>
             <a:r>
+              <a:rPr/>
               <a:t>本章依据源码提交 25c8f4a23988dd3b2cfb463613622738298c2d6c 与 SDK 1.0.1；网页 latest 可能随上游变化。</a:t>
             </a:r>
           </a:p>
@@ -41304,18 +41345,33 @@
                 <a:ea typeface="Microsoft YaHei"/>
                 <a:cs typeface="Microsoft YaHei"/>
               </a:rPr>
-              <a:t>：SDK 根，包含 SDK 的 </a:t>
-            </a:r>
+              <a:t>：SDK 搜索位置，通常填目标 SDK 根。</a:t>
+            </a:r>
+          </a:p>
+          <a:p>
+            <a:pPr>
+              <a:lnSpc>
+                <a:spcPct val="120000"/>
+              </a:lnSpc>
+              <a:defRPr sz="1950" b="0">
+                <a:solidFill>
+                  <a:srgbClr val="29263B"/>
+                </a:solidFill>
+                <a:latin typeface="Microsoft YaHei"/>
+                <a:ea typeface="Microsoft YaHei"/>
+                <a:cs typeface="Microsoft YaHei"/>
+              </a:defRPr>
+            </a:pPr>
             <a:r>
               <a:rPr sz="1950" b="0">
                 <a:solidFill>
-                  <a:srgbClr val="0070C0"/>
-                </a:solidFill>
-                <a:latin typeface="Microsoft YaHei"/>
-                <a:ea typeface="Microsoft YaHei"/>
-                <a:cs typeface="Microsoft YaHei"/>
-              </a:rPr>
-              <a:t>cmake</a:t>
+                  <a:srgbClr val="B84E00"/>
+                </a:solidFill>
+                <a:latin typeface="Microsoft YaHei"/>
+                <a:ea typeface="Microsoft YaHei"/>
+                <a:cs typeface="Microsoft YaHei"/>
+              </a:rPr>
+              <a:t>CROSS_COMPILE</a:t>
             </a:r>
             <a:r>
               <a:rPr sz="1950" b="0">
@@ -41326,7 +41382,7 @@
                 <a:ea typeface="Microsoft YaHei"/>
                 <a:cs typeface="Microsoft YaHei"/>
               </a:rPr>
-              <a:t> 接入层。</a:t>
+              <a:t>：工具目录加共同前缀，末尾保留横线。</a:t>
             </a:r>
           </a:p>
           <a:p>
@@ -41334,6 +41390,9 @@
               <a:lnSpc>
                 <a:spcPct val="120000"/>
               </a:lnSpc>
+              <a:spcAft>
+                <a:spcPts val="1200"/>
+              </a:spcAft>
               <a:defRPr sz="1950" b="0">
                 <a:solidFill>
                   <a:srgbClr val="29263B"/>
@@ -41352,7 +41411,7 @@
                 <a:ea typeface="Microsoft YaHei"/>
                 <a:cs typeface="Microsoft YaHei"/>
               </a:rPr>
-              <a:t>CROSS_COMPILE</a:t>
+              <a:t>TOOLCHAIN_ROOT</a:t>
             </a:r>
             <a:r>
               <a:rPr sz="1950" b="0">
@@ -41363,7 +41422,7 @@
                 <a:ea typeface="Microsoft YaHei"/>
                 <a:cs typeface="Microsoft YaHei"/>
               </a:rPr>
-              <a:t>：工具目录加共同前缀，末尾保留横线。</a:t>
+              <a:t>：Zephyr 工具链接入脚本的根。</a:t>
             </a:r>
           </a:p>
           <a:p>
@@ -41371,9 +41430,6 @@
               <a:lnSpc>
                 <a:spcPct val="120000"/>
               </a:lnSpc>
-              <a:spcAft>
-                <a:spcPts val="1200"/>
-              </a:spcAft>
               <a:defRPr sz="1950" b="0">
                 <a:solidFill>
                   <a:srgbClr val="29263B"/>
@@ -41403,44 +41459,7 @@
                 <a:ea typeface="Microsoft YaHei"/>
                 <a:cs typeface="Microsoft YaHei"/>
               </a:rPr>
-              <a:t>：Zephyr 工具链接入脚本的根。</a:t>
-            </a:r>
-          </a:p>
-          <a:p>
-            <a:pPr>
-              <a:lnSpc>
-                <a:spcPct val="120000"/>
-              </a:lnSpc>
-              <a:defRPr sz="1950" b="0">
-                <a:solidFill>
-                  <a:srgbClr val="29263B"/>
-                </a:solidFill>
-                <a:latin typeface="Microsoft YaHei"/>
-                <a:ea typeface="Microsoft YaHei"/>
-                <a:cs typeface="Microsoft YaHei"/>
-              </a:defRPr>
-            </a:pPr>
-            <a:r>
-              <a:rPr sz="1950" b="0">
-                <a:solidFill>
-                  <a:srgbClr val="B84E00"/>
-                </a:solidFill>
-                <a:latin typeface="Microsoft YaHei"/>
-                <a:ea typeface="Microsoft YaHei"/>
-                <a:cs typeface="Microsoft YaHei"/>
-              </a:rPr>
-              <a:t>TOOLCHAIN_ROOT</a:t>
-            </a:r>
-            <a:r>
-              <a:rPr sz="1950" b="0">
-                <a:solidFill>
-                  <a:srgbClr val="29263B"/>
-                </a:solidFill>
-                <a:latin typeface="Microsoft YaHei"/>
-                <a:ea typeface="Microsoft YaHei"/>
-                <a:cs typeface="Microsoft YaHei"/>
-              </a:rPr>
-              <a:t> 默认使用 Zephyr 源码，不是编译器 bin。</a:t>
+              <a:t xml:space="preserve"> 默认使用 Zephyr 源码，不是编译器 bin。</a:t>
             </a:r>
           </a:p>
           <a:p>
@@ -42841,7 +42860,7 @@
                 <a:ea typeface="Microsoft YaHei"/>
                 <a:cs typeface="Microsoft YaHei"/>
               </a:rPr>
-              <a:t>默认：从 </a:t>
+              <a:t xml:space="preserve">默认：从 </a:t>
             </a:r>
             <a:r>
               <a:rPr sz="1950" b="0">
@@ -42863,7 +42882,7 @@
                 <a:ea typeface="Microsoft YaHei"/>
                 <a:cs typeface="Microsoft YaHei"/>
               </a:rPr>
-              <a:t> 工作区项目取得候选，再识别模块。</a:t>
+              <a:t xml:space="preserve"> 工作区项目取得候选，再识别模块。</a:t>
             </a:r>
           </a:p>
           <a:p>
@@ -42992,7 +43011,29 @@
                 <a:ea typeface="Microsoft YaHei"/>
                 <a:cs typeface="Microsoft YaHei"/>
               </a:rPr>
-              <a:t>清单外新增 HAL 通常使用追加，不丢掉已有 CMSIS。</a:t>
+              <a:t xml:space="preserve">追加可保留其他依赖；与 </a:t>
+            </a:r>
+            <a:r>
+              <a:rPr sz="1950" b="0">
+                <a:solidFill>
+                  <a:srgbClr val="A02B93"/>
+                </a:solidFill>
+                <a:latin typeface="Microsoft YaHei"/>
+                <a:ea typeface="Microsoft YaHei"/>
+                <a:cs typeface="Microsoft YaHei"/>
+              </a:rPr>
+              <a:t>west</a:t>
+            </a:r>
+            <a:r>
+              <a:rPr sz="1950" b="0">
+                <a:solidFill>
+                  <a:srgbClr val="29263B"/>
+                </a:solidFill>
+                <a:latin typeface="Microsoft YaHei"/>
+                <a:ea typeface="Microsoft YaHei"/>
+                <a:cs typeface="Microsoft YaHei"/>
+              </a:rPr>
+              <a:t xml:space="preserve"> 模块同名时，追加模块优先。</a:t>
             </a:r>
           </a:p>
           <a:p>
@@ -44516,7 +44557,7 @@
                 <a:ea typeface="Microsoft YaHei"/>
                 <a:cs typeface="Microsoft YaHei"/>
               </a:rPr>
-              <a:t>外部 </a:t>
+              <a:t xml:space="preserve">外部 </a:t>
             </a:r>
             <a:r>
               <a:rPr sz="1950" b="0">
@@ -44538,7 +44579,7 @@
                 <a:ea typeface="Microsoft YaHei"/>
                 <a:cs typeface="Microsoft YaHei"/>
               </a:rPr>
-              <a:t> 提供 </a:t>
+              <a:t xml:space="preserve"> 提供 </a:t>
             </a:r>
             <a:r>
               <a:rPr sz="1950" b="0">
@@ -44549,7 +44590,7 @@
                 <a:ea typeface="Microsoft YaHei"/>
                 <a:cs typeface="Microsoft YaHei"/>
               </a:rPr>
-              <a:t>Core/Include/core_cm4.h</a:t>
+              <a:t>CMSIS/Core/Include/core_cm4.h</a:t>
             </a:r>
             <a:r>
               <a:rPr sz="1950" b="0">
@@ -44648,7 +44689,7 @@
                 <a:ea typeface="Microsoft YaHei"/>
                 <a:cs typeface="Microsoft YaHei"/>
               </a:rPr>
-              <a:t> 提供外置 CMake / Kconfig 入口位置。</a:t>
+              <a:t xml:space="preserve"> 提供外置 CMake / Kconfig 入口位置。</a:t>
             </a:r>
           </a:p>
           <a:p>
@@ -44674,7 +44715,7 @@
                 <a:ea typeface="Microsoft YaHei"/>
                 <a:cs typeface="Microsoft YaHei"/>
               </a:rPr>
-              <a:t>入口脚本在 Cortex-M 配置下加入库内 </a:t>
+              <a:t xml:space="preserve">入口脚本在 Cortex-M 配置下加入库内 </a:t>
             </a:r>
             <a:r>
               <a:rPr sz="1950" b="0">
@@ -44722,7 +44763,7 @@
                 <a:ea typeface="Microsoft YaHei"/>
                 <a:cs typeface="Microsoft YaHei"/>
               </a:rPr>
-              <a:t>MPS2 的 </a:t>
+              <a:t xml:space="preserve">MPS2 的 </a:t>
             </a:r>
             <a:r>
               <a:rPr sz="1950" b="0">
@@ -44744,7 +44785,7 @@
                 <a:ea typeface="Microsoft YaHei"/>
                 <a:cs typeface="Microsoft YaHei"/>
               </a:rPr>
-              <a:t> 经适配头引用 Core；它不必有独立 .c。</a:t>
+              <a:t xml:space="preserve"> 经适配头引用 Core；它不必有独立 .c。</a:t>
             </a:r>
           </a:p>
           <a:p>
@@ -45334,7 +45375,7 @@
                 <a:ea typeface="Microsoft YaHei"/>
                 <a:cs typeface="Microsoft YaHei"/>
               </a:rPr>
-              <a:t>Python 识别元数据后生成 </a:t>
+              <a:t xml:space="preserve">Python 识别元数据后生成 </a:t>
             </a:r>
             <a:r>
               <a:rPr sz="1950" b="0">
@@ -45393,7 +45434,7 @@
                 <a:ea typeface="Microsoft YaHei"/>
                 <a:cs typeface="Microsoft YaHei"/>
               </a:rPr>
-              <a:t> 读取记录，规范化名字并设置目录变量。</a:t>
+              <a:t xml:space="preserve"> 读取记录，规范化名字并设置目录变量。</a:t>
             </a:r>
           </a:p>
           <a:p>
@@ -45419,7 +45460,7 @@
                 <a:ea typeface="Microsoft YaHei"/>
                 <a:cs typeface="Microsoft YaHei"/>
               </a:rPr>
-              <a:t>根 </a:t>
+              <a:t xml:space="preserve">根 </a:t>
             </a:r>
             <a:r>
               <a:rPr sz="1950" b="0">
@@ -45430,7 +45471,7 @@
                 <a:ea typeface="Microsoft YaHei"/>
                 <a:cs typeface="Microsoft YaHei"/>
               </a:rPr>
-              <a:t>CMakeLists</a:t>
+              <a:t>CMakeLists.txt</a:t>
             </a:r>
             <a:r>
               <a:rPr sz="1950" b="0">
@@ -45441,7 +45482,7 @@
                 <a:ea typeface="Microsoft YaHei"/>
                 <a:cs typeface="Microsoft YaHei"/>
               </a:rPr>
-              <a:t> 再加载每个已识别模块的 CMake 入口。</a:t>
+              <a:t xml:space="preserve"> 再加载提供了非空 CMake 入口的模块。</a:t>
             </a:r>
           </a:p>
           <a:p>
@@ -45478,7 +45519,7 @@
                 <a:ea typeface="Microsoft YaHei"/>
                 <a:cs typeface="Microsoft YaHei"/>
               </a:rPr>
-              <a:t> 是结果；提前伪造它不会代替这些步骤。</a:t>
+              <a:t xml:space="preserve"> 是结果；提前伪造它不会代替这些步骤。</a:t>
             </a:r>
           </a:p>
         </p:txBody>
